--- a/hack_files/ATHAR_GISEC_Hackathon-final.pptx
+++ b/hack_files/ATHAR_GISEC_Hackathon-final.pptx
@@ -7485,7 +7485,7 @@
                 <a:ea typeface="Inter" pitchFamily="34" charset="-122"/>
                 <a:cs typeface="Inter" pitchFamily="34" charset="-120"/>
               </a:rPr>
-              <a:t>Attacked before it was submitted</a:t>
+              <a:t>Attacked before submission — then run on real data</a:t>
             </a:r>
             <a:endParaRPr lang="en-US" sz="3000" dirty="0"/>
           </a:p>
@@ -7524,7 +7524,7 @@
                 <a:ea typeface="Inter" pitchFamily="34" charset="-122"/>
                 <a:cs typeface="Inter" pitchFamily="34" charset="-120"/>
               </a:rPr>
-              <a:t>Every claim here was run, not asserted — including a pass over a real AWS IAM export.</a:t>
+              <a:t>Every claim was run, not asserted. Where the evidence is thin, the number says so.</a:t>
             </a:r>
             <a:endParaRPr lang="en-US" sz="1500" dirty="0"/>
           </a:p>
@@ -7678,7 +7678,7 @@
                 <a:ea typeface="Inter" pitchFamily="34" charset="-122"/>
                 <a:cs typeface="Inter" pitchFamily="34" charset="-120"/>
               </a:rPr>
-              <a:t>1,859 · 167 · 21 automated tests</a:t>
+              <a:t>1,887 automated tests, all green</a:t>
             </a:r>
             <a:endParaRPr lang="en-US" sz="1300" dirty="0"/>
           </a:p>
@@ -8186,7 +8186,7 @@
                 <a:ea typeface="Inter" pitchFamily="34" charset="-122"/>
                 <a:cs typeface="Inter" pitchFamily="34" charset="-120"/>
               </a:rPr>
-              <a:t>2 rounds of adversarial review</a:t>
+              <a:t>Real AWS IAM export</a:t>
             </a:r>
             <a:endParaRPr lang="en-US" sz="1300" dirty="0"/>
           </a:p>
@@ -8225,7 +8225,7 @@
                 <a:ea typeface="Inter" pitchFamily="34" charset="-122"/>
                 <a:cs typeface="Inter" pitchFamily="34" charset="-120"/>
               </a:rPr>
-              <a:t>5 real flaws found and fixed, incl. an open redirect and a double-commit</a:t>
+              <a:t>Third-party fixture, no ground truth — 100% action coverage</a:t>
             </a:r>
             <a:endParaRPr lang="en-US" sz="1050" dirty="0"/>
           </a:p>
@@ -8996,7 +8996,7 @@
                           <a:ea typeface="Inter" pitchFamily="34" charset="-122"/>
                           <a:cs typeface="Inter" pitchFamily="34" charset="-120"/>
                         </a:rPr>
-                        <a:t>Ran make demo twice</a:t>
+                        <a:t>Asked whether 100% is real</a:t>
                       </a:r>
                       <a:endParaRPr lang="en-US" sz="1200" dirty="0">
                         <a:latin typeface="Inter" charset="0"/>
@@ -9064,7 +9064,7 @@
                           <a:ea typeface="Inter" pitchFamily="34" charset="-122"/>
                           <a:cs typeface="Inter" pitchFamily="34" charset="-120"/>
                         </a:rPr>
-                        <a:t>Idempotent.  </a:t>
+                        <a:t>Bounded.  95% CI 92.6–100% on n=48, printed on the page</a:t>
                       </a:r>
                       <a:pPr indent="0" marL="0">
                         <a:buNone/>
@@ -9078,7 +9078,7 @@
                           <a:ea typeface="Inter" pitchFamily="34" charset="-122"/>
                           <a:cs typeface="Inter" pitchFamily="34" charset="-120"/>
                         </a:rPr>
-                        <a:t>12× “already anchored”, no duplicates</a:t>
+                        <a:t/>
                       </a:r>
                       <a:endParaRPr lang="en-US" sz="1150" dirty="0">
                         <a:latin typeface="Inter" charset="0"/>
@@ -9579,7 +9579,7 @@
                 <a:ea typeface="Inter" pitchFamily="34" charset="-122"/>
                 <a:cs typeface="Inter" pitchFamily="34" charset="-120"/>
               </a:rPr>
-              <a:t>Ledger ≠ correctness  </a:t>
+              <a:t>Ground truth is self-derived  </a:t>
             </a:r>
             <a:pPr indent="0" marL="0">
               <a:lnSpc>
@@ -9596,7 +9596,7 @@
                 <a:ea typeface="Inter" pitchFamily="34" charset="-122"/>
                 <a:cs typeface="Inter" pitchFamily="34" charset="-120"/>
               </a:rPr>
-              <a:t>Proves a finding wasn’t edited — not that it’s right.</a:t>
+              <a:t>A pipeline-recovery check, not real-estate accuracy.</a:t>
             </a:r>
             <a:endParaRPr lang="en-US" sz="1100" dirty="0"/>
           </a:p>
@@ -9697,7 +9697,7 @@
                 <a:ea typeface="Inter" pitchFamily="34" charset="-122"/>
                 <a:cs typeface="Inter" pitchFamily="34" charset="-120"/>
               </a:rPr>
-              <a:t>R7 peer-outlier now fires on real data  </a:t>
+              <a:t>R7 fires on real data  </a:t>
             </a:r>
             <a:pPr indent="0" marL="0">
               <a:lnSpc>
@@ -9714,7 +9714,7 @@
                 <a:ea typeface="Inter" pitchFamily="34" charset="-122"/>
                 <a:cs typeface="Inter" pitchFamily="34" charset="-120"/>
               </a:rPr>
-              <a:t>36 hits on a real AWS export.</a:t>
+              <a:t>35 hits on a real AWS export; 0 on synthetic.</a:t>
             </a:r>
             <a:endParaRPr lang="en-US" sz="1100" dirty="0"/>
           </a:p>
@@ -9982,7 +9982,7 @@
                 <a:ea typeface="Inter" pitchFamily="34" charset="-122"/>
                 <a:cs typeface="Inter" pitchFamily="34" charset="-120"/>
               </a:rPr>
-              <a:t>Synthetic demo estate at month 12 · fictional customer “Nahar Digital Authority” · plus a real AWS IAM export</a:t>
+              <a:t>Synthetic demo estate at month 12 · plus a real AWS IAM export the engine had never seen</a:t>
             </a:r>
             <a:endParaRPr lang="en-US" sz="1500" dirty="0"/>
           </a:p>
@@ -10336,7 +10336,7 @@
                 <a:ea typeface="Inter" pitchFamily="34" charset="-122"/>
                 <a:cs typeface="Inter" pitchFamily="34" charset="-120"/>
               </a:rPr>
-              <a:t>47 → 99</a:t>
+              <a:t>100%</a:t>
             </a:r>
             <a:endParaRPr lang="en-US" sz="3200" dirty="0"/>
           </a:p>
@@ -10375,7 +10375,7 @@
                 <a:ea typeface="Inter" pitchFamily="34" charset="-122"/>
                 <a:cs typeface="Inter" pitchFamily="34" charset="-120"/>
               </a:rPr>
-              <a:t>findings, month 1 → 12</a:t>
+              <a:t>action coverage, real AWS</a:t>
             </a:r>
             <a:endParaRPr lang="en-US" sz="1200" dirty="0"/>
           </a:p>
@@ -10414,7 +10414,7 @@
                 <a:ea typeface="Inter" pitchFamily="34" charset="-122"/>
                 <a:cs typeface="Inter" pitchFamily="34" charset="-120"/>
               </a:rPr>
-              <a:t>growth traced to broken offboarding</a:t>
+              <a:t>up from 30.9% · 0 unmapped</a:t>
             </a:r>
             <a:endParaRPr lang="en-US" sz="950" dirty="0"/>
           </a:p>
@@ -10480,7 +10480,7 @@
                 <a:ea typeface="Inter" pitchFamily="34" charset="-122"/>
                 <a:cs typeface="Inter" pitchFamily="34" charset="-120"/>
               </a:rPr>
-              <a:t>318</a:t>
+              <a:t>35 → 0</a:t>
             </a:r>
             <a:endParaRPr lang="en-US" sz="3200" dirty="0"/>
           </a:p>
@@ -10519,7 +10519,7 @@
                 <a:ea typeface="Inter" pitchFamily="34" charset="-122"/>
                 <a:cs typeface="Inter" pitchFamily="34" charset="-120"/>
               </a:rPr>
-              <a:t>findings on a real AWS export</a:t>
+              <a:t>R7: real vs synthetic</a:t>
             </a:r>
             <a:endParaRPr lang="en-US" sz="1200" dirty="0"/>
           </a:p>
@@ -10558,7 +10558,7 @@
                 <a:ea typeface="Inter" pitchFamily="34" charset="-122"/>
                 <a:cs typeface="Inter" pitchFamily="34" charset="-120"/>
               </a:rPr>
-              <a:t>122 real principals · R7 fired 36×</a:t>
+              <a:t>a limitation became a result</a:t>
             </a:r>
             <a:endParaRPr lang="en-US" sz="950" dirty="0"/>
           </a:p>
@@ -10828,7 +10828,7 @@
                           <a:ea typeface="Inter" pitchFamily="34" charset="-122"/>
                           <a:cs typeface="Inter" pitchFamily="34" charset="-120"/>
                         </a:rPr>
-                        <a:t>735 principals → 507 identities; 104,593 grant rows in one model</a:t>
+                        <a:t>735 principals → 507 identities; 8 hold privilege in 2+ clouds</a:t>
                       </a:r>
                       <a:endParaRPr lang="en-US" sz="1200" dirty="0">
                         <a:latin typeface="Inter" charset="0"/>
@@ -10980,7 +10980,7 @@
                           <a:ea typeface="Inter" pitchFamily="34" charset="-122"/>
                           <a:cs typeface="Inter" pitchFamily="34" charset="-120"/>
                         </a:rPr>
-                        <a:t>Blast-radius ranking, 3-altitude explanations; one approved fix: 100 → 0</a:t>
+                        <a:t>Blast radius p90 11.6%, max 69.9%; top 5% hold 52% of all risk</a:t>
                       </a:r>
                       <a:endParaRPr lang="en-US" sz="1200" dirty="0">
                         <a:latin typeface="Inter" charset="0"/>
@@ -11202,7 +11202,7 @@
                           <a:ea typeface="Inter" pitchFamily="34" charset="-122"/>
                           <a:cs typeface="Inter" pitchFamily="34" charset="-120"/>
                         </a:rPr>
-                        <a:t>✓   </a:t>
+                        <a:t>✓   Proven on data we didn’t write</a:t>
                       </a:r>
                       <a:pPr indent="0" marL="0">
                         <a:buNone/>
@@ -11216,7 +11216,7 @@
                           <a:ea typeface="Inter" pitchFamily="34" charset="-122"/>
                           <a:cs typeface="Inter" pitchFamily="34" charset="-120"/>
                         </a:rPr>
-                        <a:t>Robust and repeatable</a:t>
+                        <a:t/>
                       </a:r>
                       <a:endParaRPr lang="en-US" sz="1250" dirty="0">
                         <a:latin typeface="Inter" charset="0"/>
@@ -11284,7 +11284,7 @@
                           <a:ea typeface="Inter" pitchFamily="34" charset="-122"/>
                           <a:cs typeface="Inter" pitchFamily="34" charset="-120"/>
                         </a:rPr>
-                        <a:t>Broken inputs handled; second run: 12× already anchored</a:t>
+                        <a:t>283 findings on 122 real principals; 100% action coverage</a:t>
                       </a:r>
                       <a:endParaRPr lang="en-US" sz="1200" dirty="0">
                         <a:latin typeface="Inter" charset="0"/>
@@ -11463,7 +11463,7 @@
                 <a:ea typeface="Inter" pitchFamily="34" charset="-122"/>
                 <a:cs typeface="Inter" pitchFamily="34" charset="-120"/>
               </a:rPr>
-              <a:t>One view of who can do what, since when</a:t>
+              <a:t>Who can do what, since when — all 3 clouds</a:t>
             </a:r>
             <a:endParaRPr lang="en-US" sz="1200" dirty="0"/>
           </a:p>
@@ -11526,7 +11526,7 @@
                 <a:ea typeface="Inter" pitchFamily="34" charset="-122"/>
                 <a:cs typeface="Inter" pitchFamily="34" charset="-120"/>
               </a:rPr>
-              <a:t>Root causes, e.g. broken offboarding</a:t>
+              <a:t>41 privileged · 87.9% MFA · 8 cross-cloud</a:t>
             </a:r>
             <a:endParaRPr lang="en-US" sz="1200" dirty="0"/>
           </a:p>
@@ -11589,7 +11589,7 @@
                 <a:ea typeface="Inter" pitchFamily="34" charset="-122"/>
                 <a:cs typeface="Inter" pitchFamily="34" charset="-120"/>
               </a:rPr>
-              <a:t>Drafted fixes — via dashboard or MCP — human-approved with SoD</a:t>
+              <a:t>Drafted fixes, human-approved with SoD</a:t>
             </a:r>
             <a:endParaRPr lang="en-US" sz="1200" dirty="0"/>
           </a:p>
@@ -11732,7 +11732,7 @@
                 <a:ea typeface="Inter" pitchFamily="34" charset="-122"/>
                 <a:cs typeface="Inter" pitchFamily="34" charset="-120"/>
               </a:rPr>
-              <a:t>Single-host writer key · simulated apply · mapping coverage on real AWS</a:t>
+              <a:t>Self-derived ground truth · single-host key · simulated apply</a:t>
             </a:r>
             <a:endParaRPr lang="en-US" sz="1050" dirty="0"/>
           </a:p>
@@ -11969,7 +11969,7 @@
                 <a:ea typeface="Inter" pitchFamily="34" charset="-122"/>
                 <a:cs typeface="Inter" pitchFamily="34" charset="-120"/>
               </a:rPr>
-              <a:t>Permissioned chain</a:t>
+              <a:t>Azure/GCP coverage</a:t>
             </a:r>
             <a:endParaRPr lang="en-US" sz="1050" dirty="0"/>
           </a:p>
@@ -12035,7 +12035,7 @@
                 <a:ea typeface="Inter" pitchFamily="34" charset="-122"/>
                 <a:cs typeface="Inter" pitchFamily="34" charset="-120"/>
               </a:rPr>
-              <a:t>Live government estate</a:t>
+              <a:t>Live gov estate</a:t>
             </a:r>
             <a:endParaRPr lang="en-US" sz="1050" dirty="0"/>
           </a:p>
